--- a/decks/maths-perimeter-area/maths-perimeter-area_ch5_area-trapezium.pptx
+++ b/decks/maths-perimeter-area/maths-perimeter-area_ch5_area-trapezium.pptx
@@ -123,30 +123,30 @@
   <p:extLst>
     <p:ext uri="{521415D9-36F7-43E2-AB2F-B90AF26B5E84}">
       <p14:sectionLst xmlns:p14="http://schemas.microsoft.com/office/powerpoint/2010/main">
-        <p14:section name="Opening" id="{d3750e44-54bf-e623-9403-bf3757777439}">
+        <p14:section name="Opening" id="{4b100947-f8c0-2ae2-8421-e5df50d34cf2}">
           <p14:sldIdLst>
             <p14:sldId id="256"/>
           </p14:sldIdLst>
         </p14:section>
-        <p14:section name="Gate" id="{11308fec-c967-6811-0514-b99a809274bc}">
+        <p14:section name="Gate" id="{6beb66e9-a5f9-650e-1e7b-15b4c1b0f8fa}">
           <p14:sldIdLst>
             <p14:sldId id="257"/>
             <p14:sldId id="258"/>
           </p14:sldIdLst>
         </p14:section>
-        <p14:section name="Pre-teach" id="{21514d15-236f-2fbc-91bb-da1f91a7c311}">
+        <p14:section name="Pre-teach" id="{e49395a3-4771-0e46-c86d-a6742a03d87e}">
           <p14:sldIdLst>
             <p14:sldId id="259"/>
             <p14:sldId id="260"/>
           </p14:sldIdLst>
         </p14:section>
-        <p14:section name="Read-along" id="{54185a24-1e19-8e0d-dd41-3e8e962fff5a}">
+        <p14:section name="Read-along" id="{f0adfba6-f9d7-e40c-b6fc-86e49a1ac953}">
           <p14:sldIdLst>
             <p14:sldId id="261"/>
             <p14:sldId id="262"/>
           </p14:sldIdLst>
         </p14:section>
-        <p14:section name="Teach" id="{ff1d849f-bbe8-5f3c-0a22-fce426a38871}">
+        <p14:section name="Teach" id="{3a33e277-c009-0196-6e76-733a2312ec2c}">
           <p14:sldIdLst>
             <p14:sldId id="263"/>
             <p14:sldId id="264"/>
@@ -154,18 +154,18 @@
             <p14:sldId id="266"/>
           </p14:sldIdLst>
         </p14:section>
-        <p14:section name="Routes" id="{37b33034-6027-71a3-5c20-a4d6cd238bfb}">
+        <p14:section name="Routes" id="{2477dda3-c320-74dd-6c6e-10016e9b7ce8}">
           <p14:sldIdLst>
             <p14:sldId id="267"/>
             <p14:sldId id="268"/>
           </p14:sldIdLst>
         </p14:section>
-        <p14:section name="Close" id="{c347eae8-1236-7067-2f31-6c9bfb18a511}">
+        <p14:section name="Close" id="{eac7fcad-1c58-1237-21bc-3750971d3a83}">
           <p14:sldIdLst>
             <p14:sldId id="269"/>
           </p14:sldIdLst>
         </p14:section>
-        <p14:section name="Answers" id="{3856c98e-83d9-0f63-0ba7-a432d26e4550}">
+        <p14:section name="Answers" id="{d449e875-d598-d73e-34ef-d1d5a4469636}">
           <p14:sldIdLst>
             <p14:sldId id="270"/>
             <p14:sldId id="271"/>
@@ -1225,7 +1225,7 @@
             <a:r>
               <a:rPr lang="en-US" dirty="0"/>
               <a:t>Answers — task 2: Which calculation?. Reveal the answer; pupils mark their own work in a different colour, then read the "why" together. Same destination for every lane, so one answer serves the whole class.
-Answer: A   (8 + 12) ÷ 2 × 4
+Answer: B   (8 + 12) ÷ 2 × 4
 Why: Add the parallel sides, halve, multiply by the perpendicular height: (8 + 12) ÷ 2 × 4 = 40.
 Ask a Support pupil to explain one step, and a Stretch pupil to share their extension.</a:t>
             </a:r>
@@ -1407,7 +1407,7 @@
             <a:r>
               <a:rPr lang="en-US" dirty="0"/>
               <a:t>Do now — retrieval. Silent, no notes, no help: recall comes before any support. Give about four minutes.
-1. In the trapezium formula, which pair of sides do you add?  →  A   the two parallel sides
+1. In the trapezium formula, which pair of sides do you add?  →  C   the two parallel sides
 2. A trapezium has parallel sides of 6 cm and 10 cm and a perpendicular height of 4 cm. What is its area?  →  32 cm²
 3. Two identical trapezia fit together to make a ___.  →  parallelogram
 Circulate: who gets 3/3 (Stretch route), 2/3 (Core), 0–1 (Support)? Use this to route pupils later in the lesson.</a:t>
@@ -1499,7 +1499,7 @@
             <a:r>
               <a:rPr lang="en-US" dirty="0"/>
               <a:t>Answers — pupils mark their own in a different colour, then hands up for 3/3, 2/3, 1/3.
-1. A   the two parallel sides. The formula adds the two parallel sides, halves, then multiplies by the perpendicular height.
+1. C   the two parallel sides. The formula adds the two parallel sides, halves, then multiplies by the perpendicular height.
 2. 32 cm². 6 + 10 = 16, half is 8, and 8 × 4 = 32.
 3. parallelogram. Turn one trapezium upside down and fit it against the other: the result is a parallelogram.
 Say the route each score points to: 3/3 Stretch, 2/3 Core, 0–1 Support. Pupils may choose to move up.</a:t>
@@ -7226,35 +7226,35 @@
                 <a:ea typeface="Calibri" pitchFamily="34" charset="-122"/>
                 <a:cs typeface="Calibri" pitchFamily="34" charset="-120"/>
               </a:rPr>
+              <a:t>(8 + 12) × 4      </a:t>
+            </a:r>
+            <a:pPr algn="ctr" indent="0" marL="0">
+              <a:buNone/>
+            </a:pPr>
+            <a:r>
+              <a:rPr lang="en-US" sz="1800" b="1" dirty="0">
+                <a:solidFill>
+                  <a:srgbClr val="B8862B"/>
+                </a:solidFill>
+                <a:latin typeface="Calibri" pitchFamily="34" charset="0"/>
+                <a:ea typeface="Calibri" pitchFamily="34" charset="-122"/>
+                <a:cs typeface="Calibri" pitchFamily="34" charset="-120"/>
+              </a:rPr>
+              <a:t>B  </a:t>
+            </a:r>
+            <a:pPr algn="ctr" indent="0" marL="0">
+              <a:buNone/>
+            </a:pPr>
+            <a:r>
+              <a:rPr lang="en-US" sz="1800" dirty="0">
+                <a:solidFill>
+                  <a:srgbClr val="1E2229"/>
+                </a:solidFill>
+                <a:latin typeface="Calibri" pitchFamily="34" charset="0"/>
+                <a:ea typeface="Calibri" pitchFamily="34" charset="-122"/>
+                <a:cs typeface="Calibri" pitchFamily="34" charset="-120"/>
+              </a:rPr>
               <a:t>(8 + 12) ÷ 2 × 4      </a:t>
-            </a:r>
-            <a:pPr algn="ctr" indent="0" marL="0">
-              <a:buNone/>
-            </a:pPr>
-            <a:r>
-              <a:rPr lang="en-US" sz="1800" b="1" dirty="0">
-                <a:solidFill>
-                  <a:srgbClr val="B8862B"/>
-                </a:solidFill>
-                <a:latin typeface="Calibri" pitchFamily="34" charset="0"/>
-                <a:ea typeface="Calibri" pitchFamily="34" charset="-122"/>
-                <a:cs typeface="Calibri" pitchFamily="34" charset="-120"/>
-              </a:rPr>
-              <a:t>B  </a:t>
-            </a:r>
-            <a:pPr algn="ctr" indent="0" marL="0">
-              <a:buNone/>
-            </a:pPr>
-            <a:r>
-              <a:rPr lang="en-US" sz="1800" dirty="0">
-                <a:solidFill>
-                  <a:srgbClr val="1E2229"/>
-                </a:solidFill>
-                <a:latin typeface="Calibri" pitchFamily="34" charset="0"/>
-                <a:ea typeface="Calibri" pitchFamily="34" charset="-122"/>
-                <a:cs typeface="Calibri" pitchFamily="34" charset="-120"/>
-              </a:rPr>
-              <a:t>(8 + 12) × 4      </a:t>
             </a:r>
             <a:pPr algn="ctr" indent="0" marL="0">
               <a:buNone/>
@@ -9127,7 +9127,7 @@
                 <a:ea typeface="Cambria" pitchFamily="34" charset="-122"/>
                 <a:cs typeface="Cambria" pitchFamily="34" charset="-120"/>
               </a:rPr>
-              <a:t>A   (8 + 12) ÷ 2 × 4</a:t>
+              <a:t>B   (8 + 12) ÷ 2 × 4</a:t>
             </a:r>
             <a:endParaRPr lang="en-US" sz="1800" dirty="0"/>
           </a:p>
@@ -10120,7 +10120,7 @@
                 <a:ea typeface="Calibri" pitchFamily="34" charset="-122"/>
                 <a:cs typeface="Calibri" pitchFamily="34" charset="-120"/>
               </a:rPr>
-              <a:t>the two parallel sides</a:t>
+              <a:t>the base and the height</a:t>
             </a:r>
             <a:endParaRPr lang="en-US" sz="2400" dirty="0"/>
           </a:p>
@@ -10194,7 +10194,7 @@
                 <a:ea typeface="Calibri" pitchFamily="34" charset="-122"/>
                 <a:cs typeface="Calibri" pitchFamily="34" charset="-120"/>
               </a:rPr>
-              <a:t>the base and the height</a:t>
+              <a:t>the two parallel sides</a:t>
             </a:r>
             <a:endParaRPr lang="en-US" sz="2400" dirty="0"/>
           </a:p>
@@ -10991,7 +10991,7 @@
                 <a:ea typeface="Calibri" pitchFamily="34" charset="-122"/>
                 <a:cs typeface="Calibri" pitchFamily="34" charset="-120"/>
               </a:rPr>
-              <a:t>A   the two parallel sides</a:t>
+              <a:t>C   the two parallel sides</a:t>
             </a:r>
             <a:endParaRPr lang="en-US" sz="2200" dirty="0"/>
           </a:p>

--- a/decks/maths-perimeter-area/maths-perimeter-area_ch5_area-trapezium.pptx
+++ b/decks/maths-perimeter-area/maths-perimeter-area_ch5_area-trapezium.pptx
@@ -123,30 +123,30 @@
   <p:extLst>
     <p:ext uri="{521415D9-36F7-43E2-AB2F-B90AF26B5E84}">
       <p14:sectionLst xmlns:p14="http://schemas.microsoft.com/office/powerpoint/2010/main">
-        <p14:section name="Opening" id="{4b100947-f8c0-2ae2-8421-e5df50d34cf2}">
+        <p14:section name="Opening" id="{862eb3f1-c734-1225-ff10-44c6cc6d2f26}">
           <p14:sldIdLst>
             <p14:sldId id="256"/>
           </p14:sldIdLst>
         </p14:section>
-        <p14:section name="Gate" id="{6beb66e9-a5f9-650e-1e7b-15b4c1b0f8fa}">
+        <p14:section name="Gate" id="{50964028-3665-8952-b9bd-6a6d8cbb1bc5}">
           <p14:sldIdLst>
             <p14:sldId id="257"/>
             <p14:sldId id="258"/>
           </p14:sldIdLst>
         </p14:section>
-        <p14:section name="Pre-teach" id="{e49395a3-4771-0e46-c86d-a6742a03d87e}">
+        <p14:section name="Pre-teach" id="{fb62be6a-5079-4341-958b-50edc771d201}">
           <p14:sldIdLst>
             <p14:sldId id="259"/>
             <p14:sldId id="260"/>
           </p14:sldIdLst>
         </p14:section>
-        <p14:section name="Read-along" id="{f0adfba6-f9d7-e40c-b6fc-86e49a1ac953}">
+        <p14:section name="Read-along" id="{f1ba5f0f-4a1e-f2a6-f1c5-bb148907d098}">
           <p14:sldIdLst>
             <p14:sldId id="261"/>
             <p14:sldId id="262"/>
           </p14:sldIdLst>
         </p14:section>
-        <p14:section name="Teach" id="{3a33e277-c009-0196-6e76-733a2312ec2c}">
+        <p14:section name="Teach" id="{5494303c-c7bd-53d0-a908-c38ed8d3bb42}">
           <p14:sldIdLst>
             <p14:sldId id="263"/>
             <p14:sldId id="264"/>
@@ -154,18 +154,18 @@
             <p14:sldId id="266"/>
           </p14:sldIdLst>
         </p14:section>
-        <p14:section name="Routes" id="{2477dda3-c320-74dd-6c6e-10016e9b7ce8}">
+        <p14:section name="Routes" id="{9306693e-ee60-3b89-aba1-db8714fe288e}">
           <p14:sldIdLst>
             <p14:sldId id="267"/>
             <p14:sldId id="268"/>
           </p14:sldIdLst>
         </p14:section>
-        <p14:section name="Close" id="{eac7fcad-1c58-1237-21bc-3750971d3a83}">
+        <p14:section name="Close" id="{a1bb1969-a44a-4354-4908-8bcacf83f497}">
           <p14:sldIdLst>
             <p14:sldId id="269"/>
           </p14:sldIdLst>
         </p14:section>
-        <p14:section name="Answers" id="{d449e875-d598-d73e-34ef-d1d5a4469636}">
+        <p14:section name="Answers" id="{d4395233-c9bd-fe05-ed4f-bc39cd3f4817}">
           <p14:sldIdLst>
             <p14:sldId id="270"/>
             <p14:sldId id="271"/>
